--- a/DAQ_design/Assisi/v0.2.1/code/data_processing_offline/labview_daq/10282026/10282026-results.pptx
+++ b/DAQ_design/Assisi/v0.2.1/code/data_processing_offline/labview_daq/10282026/10282026-results.pptx
@@ -5,10 +5,10 @@
     <p:sldMasterId id="2147483648" r:id="rId1"/>
   </p:sldMasterIdLst>
   <p:notesMasterIdLst>
-    <p:notesMasterId r:id="rId9"/>
+    <p:notesMasterId r:id="rId18"/>
   </p:notesMasterIdLst>
   <p:handoutMasterIdLst>
-    <p:handoutMasterId r:id="rId10"/>
+    <p:handoutMasterId r:id="rId19"/>
   </p:handoutMasterIdLst>
   <p:sldIdLst>
     <p:sldId id="256" r:id="rId2"/>
@@ -17,7 +17,16 @@
     <p:sldId id="263" r:id="rId5"/>
     <p:sldId id="259" r:id="rId6"/>
     <p:sldId id="264" r:id="rId7"/>
-    <p:sldId id="258" r:id="rId8"/>
+    <p:sldId id="267" r:id="rId8"/>
+    <p:sldId id="270" r:id="rId9"/>
+    <p:sldId id="271" r:id="rId10"/>
+    <p:sldId id="272" r:id="rId11"/>
+    <p:sldId id="273" r:id="rId12"/>
+    <p:sldId id="265" r:id="rId13"/>
+    <p:sldId id="268" r:id="rId14"/>
+    <p:sldId id="266" r:id="rId15"/>
+    <p:sldId id="269" r:id="rId16"/>
+    <p:sldId id="258" r:id="rId17"/>
   </p:sldIdLst>
   <p:sldSz cx="12192000" cy="6858000"/>
   <p:notesSz cx="6858000" cy="9144000"/>
@@ -143,7 +152,7 @@
 
 <file path=ppt/comments/modernComment_102_C9EB5396.xml><?xml version="1.0" encoding="utf-8"?>
 <p188:cmLst xmlns:a="http://schemas.openxmlformats.org/drawingml/2006/main" xmlns:r="http://schemas.openxmlformats.org/officeDocument/2006/relationships" xmlns:p188="http://schemas.microsoft.com/office/powerpoint/2018/8/main">
-  <p188:cm id="{BC0F572B-F0EC-411F-9F73-3F08381BA155}" authorId="{C6C367B0-5300-5B4F-3091-62559A53AA73}" created="2026-08-27T20:58:00.368">
+  <p188:cm id="{BC0F572B-F0EC-411F-9F73-3F08381BA155}" authorId="{C6C367B0-5300-5B4F-3091-62559A53AA73}" status="resolved" created="2026-08-27T20:58:00.368" complete="100000">
     <ac:deMkLst xmlns:ac="http://schemas.microsoft.com/office/drawing/2013/main/command">
       <pc:docMk xmlns:pc="http://schemas.microsoft.com/office/powerpoint/2013/main/command"/>
       <pc:sldMk xmlns:pc="http://schemas.microsoft.com/office/powerpoint/2013/main/command" cId="3387642774" sldId="258"/>
@@ -2773,7 +2782,374 @@
 </p:sld>
 </file>
 
-<file path=ppt/slides/slide2.xml><?xml version="1.0" encoding="utf-8"?>
+<file path=ppt/slides/slide10.xml><?xml version="1.0" encoding="utf-8"?>
+<p:sld xmlns:a="http://schemas.openxmlformats.org/drawingml/2006/main" xmlns:r="http://schemas.openxmlformats.org/officeDocument/2006/relationships" xmlns:p="http://schemas.openxmlformats.org/presentationml/2006/main">
+  <p:cSld>
+    <p:spTree>
+      <p:nvGrpSpPr>
+        <p:cNvPr id="1" name="">
+          <a:extLst>
+            <a:ext uri="{FF2B5EF4-FFF2-40B4-BE49-F238E27FC236}">
+              <a16:creationId xmlns:a16="http://schemas.microsoft.com/office/drawing/2014/main" id="{8754D975-AD46-E09F-9653-324EC8F82C9F}"/>
+            </a:ext>
+          </a:extLst>
+        </p:cNvPr>
+        <p:cNvGrpSpPr/>
+        <p:nvPr/>
+      </p:nvGrpSpPr>
+      <p:grpSpPr>
+        <a:xfrm>
+          <a:off x="0" y="0"/>
+          <a:ext cx="0" cy="0"/>
+          <a:chOff x="0" y="0"/>
+          <a:chExt cx="0" cy="0"/>
+        </a:xfrm>
+      </p:grpSpPr>
+      <p:sp>
+        <p:nvSpPr>
+          <p:cNvPr id="2" name="Title 1">
+            <a:extLst>
+              <a:ext uri="{FF2B5EF4-FFF2-40B4-BE49-F238E27FC236}">
+                <a16:creationId xmlns:a16="http://schemas.microsoft.com/office/drawing/2014/main" id="{7B9481B0-690A-7326-FA56-84048AFBB24B}"/>
+              </a:ext>
+            </a:extLst>
+          </p:cNvPr>
+          <p:cNvSpPr>
+            <a:spLocks noGrp="1"/>
+          </p:cNvSpPr>
+          <p:nvPr>
+            <p:ph type="title"/>
+          </p:nvPr>
+        </p:nvSpPr>
+        <p:spPr/>
+        <p:txBody>
+          <a:bodyPr/>
+          <a:lstStyle/>
+          <a:p>
+            <a:r>
+              <a:rPr lang="en-US" dirty="0"/>
+              <a:t>33k-5Hz-retest</a:t>
+            </a:r>
+          </a:p>
+        </p:txBody>
+      </p:sp>
+      <p:sp>
+        <p:nvSpPr>
+          <p:cNvPr id="3" name="Content Placeholder 2">
+            <a:extLst>
+              <a:ext uri="{FF2B5EF4-FFF2-40B4-BE49-F238E27FC236}">
+                <a16:creationId xmlns:a16="http://schemas.microsoft.com/office/drawing/2014/main" id="{CA8A1DB5-4240-5B42-74EC-2C4C80289C20}"/>
+              </a:ext>
+            </a:extLst>
+          </p:cNvPr>
+          <p:cNvSpPr>
+            <a:spLocks noGrp="1"/>
+          </p:cNvSpPr>
+          <p:nvPr>
+            <p:ph sz="half" idx="1"/>
+          </p:nvPr>
+        </p:nvSpPr>
+        <p:spPr/>
+        <p:txBody>
+          <a:bodyPr/>
+          <a:lstStyle/>
+          <a:p>
+            <a:endParaRPr lang="en-US"/>
+          </a:p>
+        </p:txBody>
+      </p:sp>
+      <p:sp>
+        <p:nvSpPr>
+          <p:cNvPr id="4" name="Content Placeholder 3">
+            <a:extLst>
+              <a:ext uri="{FF2B5EF4-FFF2-40B4-BE49-F238E27FC236}">
+                <a16:creationId xmlns:a16="http://schemas.microsoft.com/office/drawing/2014/main" id="{7D414842-BA91-95FB-42BE-8278CE8F7109}"/>
+              </a:ext>
+            </a:extLst>
+          </p:cNvPr>
+          <p:cNvSpPr>
+            <a:spLocks noGrp="1"/>
+          </p:cNvSpPr>
+          <p:nvPr>
+            <p:ph sz="half" idx="2"/>
+          </p:nvPr>
+        </p:nvSpPr>
+        <p:spPr/>
+        <p:txBody>
+          <a:bodyPr/>
+          <a:lstStyle/>
+          <a:p>
+            <a:endParaRPr lang="en-US"/>
+          </a:p>
+        </p:txBody>
+      </p:sp>
+      <p:sp>
+        <p:nvSpPr>
+          <p:cNvPr id="5" name="Slide Number Placeholder 4">
+            <a:extLst>
+              <a:ext uri="{FF2B5EF4-FFF2-40B4-BE49-F238E27FC236}">
+                <a16:creationId xmlns:a16="http://schemas.microsoft.com/office/drawing/2014/main" id="{B34F5F42-7144-E9F6-CFEF-6E4673E871B4}"/>
+              </a:ext>
+            </a:extLst>
+          </p:cNvPr>
+          <p:cNvSpPr>
+            <a:spLocks noGrp="1"/>
+          </p:cNvSpPr>
+          <p:nvPr>
+            <p:ph type="sldNum" sz="quarter" idx="12"/>
+          </p:nvPr>
+        </p:nvSpPr>
+        <p:spPr/>
+        <p:txBody>
+          <a:bodyPr/>
+          <a:lstStyle/>
+          <a:p>
+            <a:fld id="{B4E9AFF7-6653-6A4D-A979-64D2F5BECA26}" type="slidenum">
+              <a:rPr lang="en-US" smtClean="0"/>
+              <a:t>10</a:t>
+            </a:fld>
+            <a:endParaRPr lang="en-US"/>
+          </a:p>
+        </p:txBody>
+      </p:sp>
+    </p:spTree>
+    <p:extLst>
+      <p:ext uri="{BB962C8B-B14F-4D97-AF65-F5344CB8AC3E}">
+        <p14:creationId xmlns:p14="http://schemas.microsoft.com/office/powerpoint/2010/main" val="4136115844"/>
+      </p:ext>
+    </p:extLst>
+  </p:cSld>
+  <p:clrMapOvr>
+    <a:masterClrMapping/>
+  </p:clrMapOvr>
+</p:sld>
+</file>
+
+<file path=ppt/slides/slide11.xml><?xml version="1.0" encoding="utf-8"?>
+<p:sld xmlns:a="http://schemas.openxmlformats.org/drawingml/2006/main" xmlns:r="http://schemas.openxmlformats.org/officeDocument/2006/relationships" xmlns:p="http://schemas.openxmlformats.org/presentationml/2006/main">
+  <p:cSld>
+    <p:spTree>
+      <p:nvGrpSpPr>
+        <p:cNvPr id="1" name="">
+          <a:extLst>
+            <a:ext uri="{FF2B5EF4-FFF2-40B4-BE49-F238E27FC236}">
+              <a16:creationId xmlns:a16="http://schemas.microsoft.com/office/drawing/2014/main" id="{2CD7E61E-B81E-07F7-6D78-B7D6ED2843C9}"/>
+            </a:ext>
+          </a:extLst>
+        </p:cNvPr>
+        <p:cNvGrpSpPr/>
+        <p:nvPr/>
+      </p:nvGrpSpPr>
+      <p:grpSpPr>
+        <a:xfrm>
+          <a:off x="0" y="0"/>
+          <a:ext cx="0" cy="0"/>
+          <a:chOff x="0" y="0"/>
+          <a:chExt cx="0" cy="0"/>
+        </a:xfrm>
+      </p:grpSpPr>
+      <p:sp>
+        <p:nvSpPr>
+          <p:cNvPr id="2" name="Title 1">
+            <a:extLst>
+              <a:ext uri="{FF2B5EF4-FFF2-40B4-BE49-F238E27FC236}">
+                <a16:creationId xmlns:a16="http://schemas.microsoft.com/office/drawing/2014/main" id="{C9EB6E08-DB85-4FE7-A0A9-02CBD80D1C44}"/>
+              </a:ext>
+            </a:extLst>
+          </p:cNvPr>
+          <p:cNvSpPr>
+            <a:spLocks noGrp="1"/>
+          </p:cNvSpPr>
+          <p:nvPr>
+            <p:ph type="title"/>
+          </p:nvPr>
+        </p:nvSpPr>
+        <p:spPr/>
+        <p:txBody>
+          <a:bodyPr/>
+          <a:lstStyle/>
+          <a:p>
+            <a:r>
+              <a:rPr lang="en-US" dirty="0"/>
+              <a:t>33k summary</a:t>
+            </a:r>
+          </a:p>
+        </p:txBody>
+      </p:sp>
+      <p:sp>
+        <p:nvSpPr>
+          <p:cNvPr id="3" name="Content Placeholder 2">
+            <a:extLst>
+              <a:ext uri="{FF2B5EF4-FFF2-40B4-BE49-F238E27FC236}">
+                <a16:creationId xmlns:a16="http://schemas.microsoft.com/office/drawing/2014/main" id="{D6B66B9C-13B6-5060-6290-6BEDFF22D12F}"/>
+              </a:ext>
+            </a:extLst>
+          </p:cNvPr>
+          <p:cNvSpPr>
+            <a:spLocks noGrp="1"/>
+          </p:cNvSpPr>
+          <p:nvPr>
+            <p:ph sz="half" idx="1"/>
+          </p:nvPr>
+        </p:nvSpPr>
+        <p:spPr/>
+        <p:txBody>
+          <a:bodyPr/>
+          <a:lstStyle/>
+          <a:p>
+            <a:endParaRPr lang="en-US"/>
+          </a:p>
+        </p:txBody>
+      </p:sp>
+      <p:sp>
+        <p:nvSpPr>
+          <p:cNvPr id="4" name="Content Placeholder 3">
+            <a:extLst>
+              <a:ext uri="{FF2B5EF4-FFF2-40B4-BE49-F238E27FC236}">
+                <a16:creationId xmlns:a16="http://schemas.microsoft.com/office/drawing/2014/main" id="{4776CCE3-C7D5-2D65-11AC-AF100D2936C9}"/>
+              </a:ext>
+            </a:extLst>
+          </p:cNvPr>
+          <p:cNvSpPr>
+            <a:spLocks noGrp="1"/>
+          </p:cNvSpPr>
+          <p:nvPr>
+            <p:ph sz="half" idx="2"/>
+          </p:nvPr>
+        </p:nvSpPr>
+        <p:spPr/>
+        <p:txBody>
+          <a:bodyPr/>
+          <a:lstStyle/>
+          <a:p>
+            <a:endParaRPr lang="en-US"/>
+          </a:p>
+        </p:txBody>
+      </p:sp>
+      <p:sp>
+        <p:nvSpPr>
+          <p:cNvPr id="5" name="Slide Number Placeholder 4">
+            <a:extLst>
+              <a:ext uri="{FF2B5EF4-FFF2-40B4-BE49-F238E27FC236}">
+                <a16:creationId xmlns:a16="http://schemas.microsoft.com/office/drawing/2014/main" id="{1E541777-2465-1EF1-C001-471FBE617D79}"/>
+              </a:ext>
+            </a:extLst>
+          </p:cNvPr>
+          <p:cNvSpPr>
+            <a:spLocks noGrp="1"/>
+          </p:cNvSpPr>
+          <p:nvPr>
+            <p:ph type="sldNum" sz="quarter" idx="12"/>
+          </p:nvPr>
+        </p:nvSpPr>
+        <p:spPr/>
+        <p:txBody>
+          <a:bodyPr/>
+          <a:lstStyle/>
+          <a:p>
+            <a:fld id="{B4E9AFF7-6653-6A4D-A979-64D2F5BECA26}" type="slidenum">
+              <a:rPr lang="en-US" smtClean="0"/>
+              <a:t>11</a:t>
+            </a:fld>
+            <a:endParaRPr lang="en-US"/>
+          </a:p>
+        </p:txBody>
+      </p:sp>
+    </p:spTree>
+    <p:extLst>
+      <p:ext uri="{BB962C8B-B14F-4D97-AF65-F5344CB8AC3E}">
+        <p14:creationId xmlns:p14="http://schemas.microsoft.com/office/powerpoint/2010/main" val="272311901"/>
+      </p:ext>
+    </p:extLst>
+  </p:cSld>
+  <p:clrMapOvr>
+    <a:masterClrMapping/>
+  </p:clrMapOvr>
+</p:sld>
+</file>
+
+<file path=ppt/slides/slide12.xml><?xml version="1.0" encoding="utf-8"?>
+<p:sld xmlns:a="http://schemas.openxmlformats.org/drawingml/2006/main" xmlns:r="http://schemas.openxmlformats.org/officeDocument/2006/relationships" xmlns:p="http://schemas.openxmlformats.org/presentationml/2006/main">
+  <p:cSld>
+    <p:spTree>
+      <p:nvGrpSpPr>
+        <p:cNvPr id="1" name="">
+          <a:extLst>
+            <a:ext uri="{FF2B5EF4-FFF2-40B4-BE49-F238E27FC236}">
+              <a16:creationId xmlns:a16="http://schemas.microsoft.com/office/drawing/2014/main" id="{61ED402A-D5BD-D42F-CE57-C7BA900443A9}"/>
+            </a:ext>
+          </a:extLst>
+        </p:cNvPr>
+        <p:cNvGrpSpPr/>
+        <p:nvPr/>
+      </p:nvGrpSpPr>
+      <p:grpSpPr>
+        <a:xfrm>
+          <a:off x="0" y="0"/>
+          <a:ext cx="0" cy="0"/>
+          <a:chOff x="0" y="0"/>
+          <a:chExt cx="0" cy="0"/>
+        </a:xfrm>
+      </p:grpSpPr>
+      <p:sp>
+        <p:nvSpPr>
+          <p:cNvPr id="2" name="Title 1">
+            <a:extLst>
+              <a:ext uri="{FF2B5EF4-FFF2-40B4-BE49-F238E27FC236}">
+                <a16:creationId xmlns:a16="http://schemas.microsoft.com/office/drawing/2014/main" id="{FDD9E36C-D515-4E72-DD32-229B8A7DA977}"/>
+              </a:ext>
+            </a:extLst>
+          </p:cNvPr>
+          <p:cNvSpPr>
+            <a:spLocks noGrp="1"/>
+          </p:cNvSpPr>
+          <p:nvPr>
+            <p:ph type="title"/>
+          </p:nvPr>
+        </p:nvSpPr>
+        <p:spPr/>
+        <p:txBody>
+          <a:bodyPr>
+            <a:normAutofit fontScale="90000"/>
+          </a:bodyPr>
+          <a:lstStyle/>
+          <a:p>
+            <a:r>
+              <a:rPr lang="en-US" dirty="0"/>
+              <a:t>Individual Results:</a:t>
+            </a:r>
+            <a:br>
+              <a:rPr lang="en-US" dirty="0"/>
+            </a:br>
+            <a:r>
+              <a:rPr lang="en-US" dirty="0"/>
+              <a:t>82k</a:t>
+            </a:r>
+            <a:r>
+              <a:rPr lang="el-GR" dirty="0"/>
+              <a:t>Ω</a:t>
+            </a:r>
+            <a:br>
+              <a:rPr lang="en-US" dirty="0"/>
+            </a:br>
+            <a:endParaRPr lang="en-US" dirty="0"/>
+          </a:p>
+        </p:txBody>
+      </p:sp>
+    </p:spTree>
+    <p:extLst>
+      <p:ext uri="{BB962C8B-B14F-4D97-AF65-F5344CB8AC3E}">
+        <p14:creationId xmlns:p14="http://schemas.microsoft.com/office/powerpoint/2010/main" val="1329601206"/>
+      </p:ext>
+    </p:extLst>
+  </p:cSld>
+  <p:clrMapOvr>
+    <a:masterClrMapping/>
+  </p:clrMapOvr>
+</p:sld>
+</file>
+
+<file path=ppt/slides/slide13.xml><?xml version="1.0" encoding="utf-8"?>
 <p:sld xmlns:a="http://schemas.openxmlformats.org/drawingml/2006/main" xmlns:r="http://schemas.openxmlformats.org/officeDocument/2006/relationships" xmlns:p="http://schemas.openxmlformats.org/presentationml/2006/main">
   <p:cSld>
     <p:spTree>
@@ -2795,7 +3171,7 @@
           <p:cNvPr id="2" name="Title 1">
             <a:extLst>
               <a:ext uri="{FF2B5EF4-FFF2-40B4-BE49-F238E27FC236}">
-                <a16:creationId xmlns:a16="http://schemas.microsoft.com/office/drawing/2014/main" id="{336703AC-670E-A4B8-DA6D-85DC55E7A33B}"/>
+                <a16:creationId xmlns:a16="http://schemas.microsoft.com/office/drawing/2014/main" id="{993BA037-7E34-0F19-11FF-5EF9F15983A4}"/>
               </a:ext>
             </a:extLst>
           </p:cNvPr>
@@ -2813,15 +3189,94 @@
           <a:p>
             <a:r>
               <a:rPr lang="en-US" dirty="0"/>
-              <a:t>Section Break</a:t>
-            </a:r>
+              <a:t>82k-5Hz</a:t>
+            </a:r>
+          </a:p>
+        </p:txBody>
+      </p:sp>
+      <p:sp>
+        <p:nvSpPr>
+          <p:cNvPr id="3" name="Content Placeholder 2">
+            <a:extLst>
+              <a:ext uri="{FF2B5EF4-FFF2-40B4-BE49-F238E27FC236}">
+                <a16:creationId xmlns:a16="http://schemas.microsoft.com/office/drawing/2014/main" id="{494ECB6E-FD93-E343-1359-82D1E3050900}"/>
+              </a:ext>
+            </a:extLst>
+          </p:cNvPr>
+          <p:cNvSpPr>
+            <a:spLocks noGrp="1"/>
+          </p:cNvSpPr>
+          <p:nvPr>
+            <p:ph sz="half" idx="1"/>
+          </p:nvPr>
+        </p:nvSpPr>
+        <p:spPr/>
+        <p:txBody>
+          <a:bodyPr/>
+          <a:lstStyle/>
+          <a:p>
+            <a:endParaRPr lang="en-US"/>
+          </a:p>
+        </p:txBody>
+      </p:sp>
+      <p:sp>
+        <p:nvSpPr>
+          <p:cNvPr id="4" name="Content Placeholder 3">
+            <a:extLst>
+              <a:ext uri="{FF2B5EF4-FFF2-40B4-BE49-F238E27FC236}">
+                <a16:creationId xmlns:a16="http://schemas.microsoft.com/office/drawing/2014/main" id="{A6A08E03-3E29-5818-359B-50174895905C}"/>
+              </a:ext>
+            </a:extLst>
+          </p:cNvPr>
+          <p:cNvSpPr>
+            <a:spLocks noGrp="1"/>
+          </p:cNvSpPr>
+          <p:nvPr>
+            <p:ph sz="half" idx="2"/>
+          </p:nvPr>
+        </p:nvSpPr>
+        <p:spPr/>
+        <p:txBody>
+          <a:bodyPr/>
+          <a:lstStyle/>
+          <a:p>
+            <a:endParaRPr lang="en-US"/>
+          </a:p>
+        </p:txBody>
+      </p:sp>
+      <p:sp>
+        <p:nvSpPr>
+          <p:cNvPr id="5" name="Slide Number Placeholder 4">
+            <a:extLst>
+              <a:ext uri="{FF2B5EF4-FFF2-40B4-BE49-F238E27FC236}">
+                <a16:creationId xmlns:a16="http://schemas.microsoft.com/office/drawing/2014/main" id="{C0B79F46-C98A-B4EC-D929-AE06341267C9}"/>
+              </a:ext>
+            </a:extLst>
+          </p:cNvPr>
+          <p:cNvSpPr>
+            <a:spLocks noGrp="1"/>
+          </p:cNvSpPr>
+          <p:nvPr>
+            <p:ph type="sldNum" sz="quarter" idx="12"/>
+          </p:nvPr>
+        </p:nvSpPr>
+        <p:spPr/>
+        <p:txBody>
+          <a:bodyPr/>
+          <a:lstStyle/>
+          <a:p>
+            <a:fld id="{B4E9AFF7-6653-6A4D-A979-64D2F5BECA26}" type="slidenum">
+              <a:rPr lang="en-US" smtClean="0"/>
+              <a:t>13</a:t>
+            </a:fld>
+            <a:endParaRPr lang="en-US"/>
           </a:p>
         </p:txBody>
       </p:sp>
     </p:spTree>
     <p:extLst>
       <p:ext uri="{BB962C8B-B14F-4D97-AF65-F5344CB8AC3E}">
-        <p14:creationId xmlns:p14="http://schemas.microsoft.com/office/powerpoint/2010/main" val="4082244439"/>
+        <p14:creationId xmlns:p14="http://schemas.microsoft.com/office/powerpoint/2010/main" val="1442365156"/>
       </p:ext>
     </p:extLst>
   </p:cSld>
@@ -2831,7 +3286,88 @@
 </p:sld>
 </file>
 
-<file path=ppt/slides/slide3.xml><?xml version="1.0" encoding="utf-8"?>
+<file path=ppt/slides/slide14.xml><?xml version="1.0" encoding="utf-8"?>
+<p:sld xmlns:a="http://schemas.openxmlformats.org/drawingml/2006/main" xmlns:r="http://schemas.openxmlformats.org/officeDocument/2006/relationships" xmlns:p="http://schemas.openxmlformats.org/presentationml/2006/main">
+  <p:cSld>
+    <p:spTree>
+      <p:nvGrpSpPr>
+        <p:cNvPr id="1" name="">
+          <a:extLst>
+            <a:ext uri="{FF2B5EF4-FFF2-40B4-BE49-F238E27FC236}">
+              <a16:creationId xmlns:a16="http://schemas.microsoft.com/office/drawing/2014/main" id="{D6B0F020-37E4-4693-C595-DD5571E34E70}"/>
+            </a:ext>
+          </a:extLst>
+        </p:cNvPr>
+        <p:cNvGrpSpPr/>
+        <p:nvPr/>
+      </p:nvGrpSpPr>
+      <p:grpSpPr>
+        <a:xfrm>
+          <a:off x="0" y="0"/>
+          <a:ext cx="0" cy="0"/>
+          <a:chOff x="0" y="0"/>
+          <a:chExt cx="0" cy="0"/>
+        </a:xfrm>
+      </p:grpSpPr>
+      <p:sp>
+        <p:nvSpPr>
+          <p:cNvPr id="2" name="Title 1">
+            <a:extLst>
+              <a:ext uri="{FF2B5EF4-FFF2-40B4-BE49-F238E27FC236}">
+                <a16:creationId xmlns:a16="http://schemas.microsoft.com/office/drawing/2014/main" id="{0A4191E1-71D4-D926-0554-D1228959B1AA}"/>
+              </a:ext>
+            </a:extLst>
+          </p:cNvPr>
+          <p:cNvSpPr>
+            <a:spLocks noGrp="1"/>
+          </p:cNvSpPr>
+          <p:nvPr>
+            <p:ph type="title"/>
+          </p:nvPr>
+        </p:nvSpPr>
+        <p:spPr/>
+        <p:txBody>
+          <a:bodyPr>
+            <a:normAutofit fontScale="90000"/>
+          </a:bodyPr>
+          <a:lstStyle/>
+          <a:p>
+            <a:r>
+              <a:rPr lang="en-US" dirty="0"/>
+              <a:t>Individual Results:</a:t>
+            </a:r>
+            <a:br>
+              <a:rPr lang="en-US" dirty="0"/>
+            </a:br>
+            <a:r>
+              <a:rPr lang="en-US" dirty="0"/>
+              <a:t>150k</a:t>
+            </a:r>
+            <a:r>
+              <a:rPr lang="el-GR" dirty="0"/>
+              <a:t>Ω</a:t>
+            </a:r>
+            <a:br>
+              <a:rPr lang="en-US" dirty="0"/>
+            </a:br>
+            <a:endParaRPr lang="en-US" dirty="0"/>
+          </a:p>
+        </p:txBody>
+      </p:sp>
+    </p:spTree>
+    <p:extLst>
+      <p:ext uri="{BB962C8B-B14F-4D97-AF65-F5344CB8AC3E}">
+        <p14:creationId xmlns:p14="http://schemas.microsoft.com/office/powerpoint/2010/main" val="1350725190"/>
+      </p:ext>
+    </p:extLst>
+  </p:cSld>
+  <p:clrMapOvr>
+    <a:masterClrMapping/>
+  </p:clrMapOvr>
+</p:sld>
+</file>
+
+<file path=ppt/slides/slide15.xml><?xml version="1.0" encoding="utf-8"?>
 <p:sld xmlns:a="http://schemas.openxmlformats.org/drawingml/2006/main" xmlns:r="http://schemas.openxmlformats.org/officeDocument/2006/relationships" xmlns:p="http://schemas.openxmlformats.org/presentationml/2006/main">
   <p:cSld>
     <p:spTree>
@@ -2853,7 +3389,7 @@
           <p:cNvPr id="2" name="Title 1">
             <a:extLst>
               <a:ext uri="{FF2B5EF4-FFF2-40B4-BE49-F238E27FC236}">
-                <a16:creationId xmlns:a16="http://schemas.microsoft.com/office/drawing/2014/main" id="{687E83B4-0509-9C55-5923-99915535EE1E}"/>
+                <a16:creationId xmlns:a16="http://schemas.microsoft.com/office/drawing/2014/main" id="{FD38579A-D2B8-A44E-5A97-F4B3E3DFDE0F}"/>
               </a:ext>
             </a:extLst>
           </p:cNvPr>
@@ -2869,10 +3405,7 @@
           <a:bodyPr/>
           <a:lstStyle/>
           <a:p>
-            <a:r>
-              <a:rPr lang="en-US" dirty="0"/>
-              <a:t>Test Setup</a:t>
-            </a:r>
+            <a:endParaRPr lang="en-US"/>
           </a:p>
         </p:txBody>
       </p:sp>
@@ -2881,7 +3414,7 @@
           <p:cNvPr id="3" name="Content Placeholder 2">
             <a:extLst>
               <a:ext uri="{FF2B5EF4-FFF2-40B4-BE49-F238E27FC236}">
-                <a16:creationId xmlns:a16="http://schemas.microsoft.com/office/drawing/2014/main" id="{19A0C4AC-E0F9-23AB-B464-7B04810ACB71}"/>
+                <a16:creationId xmlns:a16="http://schemas.microsoft.com/office/drawing/2014/main" id="{1C05498C-196F-0DE6-EC8B-F43AEF490778}"/>
               </a:ext>
             </a:extLst>
           </p:cNvPr>
@@ -2906,7 +3439,7 @@
           <p:cNvPr id="4" name="Content Placeholder 3">
             <a:extLst>
               <a:ext uri="{FF2B5EF4-FFF2-40B4-BE49-F238E27FC236}">
-                <a16:creationId xmlns:a16="http://schemas.microsoft.com/office/drawing/2014/main" id="{C16C2CD3-28C2-5F63-BAFA-E9FA17907AC7}"/>
+                <a16:creationId xmlns:a16="http://schemas.microsoft.com/office/drawing/2014/main" id="{E66C459E-F677-F872-0B73-26CDE44C5470}"/>
               </a:ext>
             </a:extLst>
           </p:cNvPr>
@@ -2931,7 +3464,7 @@
           <p:cNvPr id="5" name="Slide Number Placeholder 4">
             <a:extLst>
               <a:ext uri="{FF2B5EF4-FFF2-40B4-BE49-F238E27FC236}">
-                <a16:creationId xmlns:a16="http://schemas.microsoft.com/office/drawing/2014/main" id="{5FBDD2AC-E4D3-CA9E-855E-8EE42A12C936}"/>
+                <a16:creationId xmlns:a16="http://schemas.microsoft.com/office/drawing/2014/main" id="{8CB9A6A0-162D-743A-F88C-85C0A7DF3B08}"/>
               </a:ext>
             </a:extLst>
           </p:cNvPr>
@@ -2949,7 +3482,7 @@
           <a:p>
             <a:fld id="{B4E9AFF7-6653-6A4D-A979-64D2F5BECA26}" type="slidenum">
               <a:rPr lang="en-US" smtClean="0"/>
-              <a:t>3</a:t>
+              <a:t>15</a:t>
             </a:fld>
             <a:endParaRPr lang="en-US"/>
           </a:p>
@@ -2958,7 +3491,7 @@
     </p:spTree>
     <p:extLst>
       <p:ext uri="{BB962C8B-B14F-4D97-AF65-F5344CB8AC3E}">
-        <p14:creationId xmlns:p14="http://schemas.microsoft.com/office/powerpoint/2010/main" val="4115979984"/>
+        <p14:creationId xmlns:p14="http://schemas.microsoft.com/office/powerpoint/2010/main" val="2710260289"/>
       </p:ext>
     </p:extLst>
   </p:cSld>
@@ -2968,7 +3501,7 @@
 </p:sld>
 </file>
 
-<file path=ppt/slides/slide4.xml><?xml version="1.0" encoding="utf-8"?>
+<file path=ppt/slides/slide16.xml><?xml version="1.0" encoding="utf-8"?>
 <p:sld xmlns:a="http://schemas.openxmlformats.org/drawingml/2006/main" xmlns:r="http://schemas.openxmlformats.org/officeDocument/2006/relationships" xmlns:p="http://schemas.openxmlformats.org/presentationml/2006/main">
   <p:cSld>
     <p:spTree>
@@ -2990,384 +3523,6 @@
           <p:cNvPr id="2" name="Title 1">
             <a:extLst>
               <a:ext uri="{FF2B5EF4-FFF2-40B4-BE49-F238E27FC236}">
-                <a16:creationId xmlns:a16="http://schemas.microsoft.com/office/drawing/2014/main" id="{B3BA3878-57F0-E7C6-608E-66E745A6DB7B}"/>
-              </a:ext>
-            </a:extLst>
-          </p:cNvPr>
-          <p:cNvSpPr>
-            <a:spLocks noGrp="1"/>
-          </p:cNvSpPr>
-          <p:nvPr>
-            <p:ph type="title"/>
-          </p:nvPr>
-        </p:nvSpPr>
-        <p:spPr/>
-        <p:txBody>
-          <a:bodyPr/>
-          <a:lstStyle/>
-          <a:p>
-            <a:r>
-              <a:rPr lang="en-US" dirty="0"/>
-              <a:t>Test Procedure</a:t>
-            </a:r>
-          </a:p>
-        </p:txBody>
-      </p:sp>
-      <p:sp>
-        <p:nvSpPr>
-          <p:cNvPr id="3" name="Content Placeholder 2">
-            <a:extLst>
-              <a:ext uri="{FF2B5EF4-FFF2-40B4-BE49-F238E27FC236}">
-                <a16:creationId xmlns:a16="http://schemas.microsoft.com/office/drawing/2014/main" id="{770EEC3B-F35D-A4C7-769E-CF68EEC151FE}"/>
-              </a:ext>
-            </a:extLst>
-          </p:cNvPr>
-          <p:cNvSpPr>
-            <a:spLocks noGrp="1"/>
-          </p:cNvSpPr>
-          <p:nvPr>
-            <p:ph sz="half" idx="1"/>
-          </p:nvPr>
-        </p:nvSpPr>
-        <p:spPr/>
-        <p:txBody>
-          <a:bodyPr/>
-          <a:lstStyle/>
-          <a:p>
-            <a:endParaRPr lang="en-US"/>
-          </a:p>
-        </p:txBody>
-      </p:sp>
-      <p:sp>
-        <p:nvSpPr>
-          <p:cNvPr id="4" name="Content Placeholder 3">
-            <a:extLst>
-              <a:ext uri="{FF2B5EF4-FFF2-40B4-BE49-F238E27FC236}">
-                <a16:creationId xmlns:a16="http://schemas.microsoft.com/office/drawing/2014/main" id="{A12E79C8-DCBC-C9F3-1268-EBC0452A5318}"/>
-              </a:ext>
-            </a:extLst>
-          </p:cNvPr>
-          <p:cNvSpPr>
-            <a:spLocks noGrp="1"/>
-          </p:cNvSpPr>
-          <p:nvPr>
-            <p:ph sz="half" idx="2"/>
-          </p:nvPr>
-        </p:nvSpPr>
-        <p:spPr/>
-        <p:txBody>
-          <a:bodyPr/>
-          <a:lstStyle/>
-          <a:p>
-            <a:endParaRPr lang="en-US"/>
-          </a:p>
-        </p:txBody>
-      </p:sp>
-      <p:sp>
-        <p:nvSpPr>
-          <p:cNvPr id="5" name="Slide Number Placeholder 4">
-            <a:extLst>
-              <a:ext uri="{FF2B5EF4-FFF2-40B4-BE49-F238E27FC236}">
-                <a16:creationId xmlns:a16="http://schemas.microsoft.com/office/drawing/2014/main" id="{A720EB8B-6BF4-5DD2-8D0F-CD5FF082A36E}"/>
-              </a:ext>
-            </a:extLst>
-          </p:cNvPr>
-          <p:cNvSpPr>
-            <a:spLocks noGrp="1"/>
-          </p:cNvSpPr>
-          <p:nvPr>
-            <p:ph type="sldNum" sz="quarter" idx="12"/>
-          </p:nvPr>
-        </p:nvSpPr>
-        <p:spPr/>
-        <p:txBody>
-          <a:bodyPr/>
-          <a:lstStyle/>
-          <a:p>
-            <a:fld id="{B4E9AFF7-6653-6A4D-A979-64D2F5BECA26}" type="slidenum">
-              <a:rPr lang="en-US" smtClean="0"/>
-              <a:t>4</a:t>
-            </a:fld>
-            <a:endParaRPr lang="en-US"/>
-          </a:p>
-        </p:txBody>
-      </p:sp>
-    </p:spTree>
-    <p:extLst>
-      <p:ext uri="{BB962C8B-B14F-4D97-AF65-F5344CB8AC3E}">
-        <p14:creationId xmlns:p14="http://schemas.microsoft.com/office/powerpoint/2010/main" val="3939459109"/>
-      </p:ext>
-    </p:extLst>
-  </p:cSld>
-  <p:clrMapOvr>
-    <a:masterClrMapping/>
-  </p:clrMapOvr>
-</p:sld>
-</file>
-
-<file path=ppt/slides/slide5.xml><?xml version="1.0" encoding="utf-8"?>
-<p:sld xmlns:a="http://schemas.openxmlformats.org/drawingml/2006/main" xmlns:r="http://schemas.openxmlformats.org/officeDocument/2006/relationships" xmlns:p="http://schemas.openxmlformats.org/presentationml/2006/main">
-  <p:cSld>
-    <p:spTree>
-      <p:nvGrpSpPr>
-        <p:cNvPr id="1" name=""/>
-        <p:cNvGrpSpPr/>
-        <p:nvPr/>
-      </p:nvGrpSpPr>
-      <p:grpSpPr>
-        <a:xfrm>
-          <a:off x="0" y="0"/>
-          <a:ext cx="0" cy="0"/>
-          <a:chOff x="0" y="0"/>
-          <a:chExt cx="0" cy="0"/>
-        </a:xfrm>
-      </p:grpSpPr>
-      <p:sp>
-        <p:nvSpPr>
-          <p:cNvPr id="2" name="Title 1">
-            <a:extLst>
-              <a:ext uri="{FF2B5EF4-FFF2-40B4-BE49-F238E27FC236}">
-                <a16:creationId xmlns:a16="http://schemas.microsoft.com/office/drawing/2014/main" id="{40D9F20D-37E0-6C63-ADE5-9C60C55F8A06}"/>
-              </a:ext>
-            </a:extLst>
-          </p:cNvPr>
-          <p:cNvSpPr>
-            <a:spLocks noGrp="1"/>
-          </p:cNvSpPr>
-          <p:nvPr>
-            <p:ph type="title"/>
-          </p:nvPr>
-        </p:nvSpPr>
-        <p:spPr/>
-        <p:txBody>
-          <a:bodyPr/>
-          <a:lstStyle/>
-          <a:p>
-            <a:r>
-              <a:rPr lang="en-US" dirty="0"/>
-              <a:t>Overall Curves</a:t>
-            </a:r>
-          </a:p>
-        </p:txBody>
-      </p:sp>
-      <p:sp>
-        <p:nvSpPr>
-          <p:cNvPr id="3" name="Content Placeholder 2">
-            <a:extLst>
-              <a:ext uri="{FF2B5EF4-FFF2-40B4-BE49-F238E27FC236}">
-                <a16:creationId xmlns:a16="http://schemas.microsoft.com/office/drawing/2014/main" id="{CAC01243-2208-2679-FAC7-1F79824A90C9}"/>
-              </a:ext>
-            </a:extLst>
-          </p:cNvPr>
-          <p:cNvSpPr>
-            <a:spLocks noGrp="1"/>
-          </p:cNvSpPr>
-          <p:nvPr>
-            <p:ph sz="half" idx="1"/>
-          </p:nvPr>
-        </p:nvSpPr>
-        <p:spPr/>
-        <p:txBody>
-          <a:bodyPr/>
-          <a:lstStyle/>
-          <a:p>
-            <a:r>
-              <a:rPr lang="en-US" dirty="0"/>
-              <a:t>Bullet number one</a:t>
-            </a:r>
-          </a:p>
-          <a:p>
-            <a:r>
-              <a:rPr lang="en-US" dirty="0"/>
-              <a:t>A second bullet</a:t>
-            </a:r>
-          </a:p>
-          <a:p>
-            <a:r>
-              <a:rPr lang="en-US" dirty="0"/>
-              <a:t>A final, third bullet</a:t>
-            </a:r>
-          </a:p>
-          <a:p>
-            <a:endParaRPr lang="en-US" dirty="0"/>
-          </a:p>
-        </p:txBody>
-      </p:sp>
-      <p:sp>
-        <p:nvSpPr>
-          <p:cNvPr id="4" name="Content Placeholder 3">
-            <a:extLst>
-              <a:ext uri="{FF2B5EF4-FFF2-40B4-BE49-F238E27FC236}">
-                <a16:creationId xmlns:a16="http://schemas.microsoft.com/office/drawing/2014/main" id="{C61B207A-02DF-2B56-07F8-69842B42FCD9}"/>
-              </a:ext>
-            </a:extLst>
-          </p:cNvPr>
-          <p:cNvSpPr>
-            <a:spLocks noGrp="1"/>
-          </p:cNvSpPr>
-          <p:nvPr>
-            <p:ph sz="half" idx="2"/>
-          </p:nvPr>
-        </p:nvSpPr>
-        <p:spPr/>
-        <p:txBody>
-          <a:bodyPr/>
-          <a:lstStyle/>
-          <a:p>
-            <a:r>
-              <a:rPr lang="en-US" dirty="0"/>
-              <a:t>Bullet number one</a:t>
-            </a:r>
-          </a:p>
-          <a:p>
-            <a:r>
-              <a:rPr lang="en-US" dirty="0"/>
-              <a:t>A second bullet</a:t>
-            </a:r>
-          </a:p>
-          <a:p>
-            <a:r>
-              <a:rPr lang="en-US" dirty="0"/>
-              <a:t>A final, third bullet</a:t>
-            </a:r>
-          </a:p>
-          <a:p>
-            <a:endParaRPr lang="en-US" dirty="0"/>
-          </a:p>
-        </p:txBody>
-      </p:sp>
-      <p:sp>
-        <p:nvSpPr>
-          <p:cNvPr id="5" name="Slide Number Placeholder 4">
-            <a:extLst>
-              <a:ext uri="{FF2B5EF4-FFF2-40B4-BE49-F238E27FC236}">
-                <a16:creationId xmlns:a16="http://schemas.microsoft.com/office/drawing/2014/main" id="{D4784A06-4452-76C2-E9CF-B1F57F1062CB}"/>
-              </a:ext>
-            </a:extLst>
-          </p:cNvPr>
-          <p:cNvSpPr>
-            <a:spLocks noGrp="1"/>
-          </p:cNvSpPr>
-          <p:nvPr>
-            <p:ph type="sldNum" sz="quarter" idx="12"/>
-          </p:nvPr>
-        </p:nvSpPr>
-        <p:spPr/>
-        <p:txBody>
-          <a:bodyPr/>
-          <a:lstStyle/>
-          <a:p>
-            <a:fld id="{B4E9AFF7-6653-6A4D-A979-64D2F5BECA26}" type="slidenum">
-              <a:rPr lang="en-US" smtClean="0"/>
-              <a:t>5</a:t>
-            </a:fld>
-            <a:endParaRPr lang="en-US"/>
-          </a:p>
-        </p:txBody>
-      </p:sp>
-    </p:spTree>
-    <p:extLst>
-      <p:ext uri="{BB962C8B-B14F-4D97-AF65-F5344CB8AC3E}">
-        <p14:creationId xmlns:p14="http://schemas.microsoft.com/office/powerpoint/2010/main" val="2202368894"/>
-      </p:ext>
-    </p:extLst>
-  </p:cSld>
-  <p:clrMapOvr>
-    <a:masterClrMapping/>
-  </p:clrMapOvr>
-</p:sld>
-</file>
-
-<file path=ppt/slides/slide6.xml><?xml version="1.0" encoding="utf-8"?>
-<p:sld xmlns:a="http://schemas.openxmlformats.org/drawingml/2006/main" xmlns:r="http://schemas.openxmlformats.org/officeDocument/2006/relationships" xmlns:p="http://schemas.openxmlformats.org/presentationml/2006/main">
-  <p:cSld>
-    <p:spTree>
-      <p:nvGrpSpPr>
-        <p:cNvPr id="1" name="">
-          <a:extLst>
-            <a:ext uri="{FF2B5EF4-FFF2-40B4-BE49-F238E27FC236}">
-              <a16:creationId xmlns:a16="http://schemas.microsoft.com/office/drawing/2014/main" id="{19532CD5-C25A-5D4B-6165-566469CF9DFD}"/>
-            </a:ext>
-          </a:extLst>
-        </p:cNvPr>
-        <p:cNvGrpSpPr/>
-        <p:nvPr/>
-      </p:nvGrpSpPr>
-      <p:grpSpPr>
-        <a:xfrm>
-          <a:off x="0" y="0"/>
-          <a:ext cx="0" cy="0"/>
-          <a:chOff x="0" y="0"/>
-          <a:chExt cx="0" cy="0"/>
-        </a:xfrm>
-      </p:grpSpPr>
-      <p:sp>
-        <p:nvSpPr>
-          <p:cNvPr id="2" name="Title 1">
-            <a:extLst>
-              <a:ext uri="{FF2B5EF4-FFF2-40B4-BE49-F238E27FC236}">
-                <a16:creationId xmlns:a16="http://schemas.microsoft.com/office/drawing/2014/main" id="{37DF280D-7ED5-BC03-D78C-45113F767353}"/>
-              </a:ext>
-            </a:extLst>
-          </p:cNvPr>
-          <p:cNvSpPr>
-            <a:spLocks noGrp="1"/>
-          </p:cNvSpPr>
-          <p:nvPr>
-            <p:ph type="title"/>
-          </p:nvPr>
-        </p:nvSpPr>
-        <p:spPr/>
-        <p:txBody>
-          <a:bodyPr/>
-          <a:lstStyle/>
-          <a:p>
-            <a:r>
-              <a:rPr lang="en-US" dirty="0"/>
-              <a:t>Individual Results:</a:t>
-            </a:r>
-            <a:br>
-              <a:rPr lang="en-US" dirty="0"/>
-            </a:br>
-            <a:endParaRPr lang="en-US" dirty="0"/>
-          </a:p>
-        </p:txBody>
-      </p:sp>
-    </p:spTree>
-    <p:extLst>
-      <p:ext uri="{BB962C8B-B14F-4D97-AF65-F5344CB8AC3E}">
-        <p14:creationId xmlns:p14="http://schemas.microsoft.com/office/powerpoint/2010/main" val="3013089025"/>
-      </p:ext>
-    </p:extLst>
-  </p:cSld>
-  <p:clrMapOvr>
-    <a:masterClrMapping/>
-  </p:clrMapOvr>
-</p:sld>
-</file>
-
-<file path=ppt/slides/slide7.xml><?xml version="1.0" encoding="utf-8"?>
-<p:sld xmlns:a="http://schemas.openxmlformats.org/drawingml/2006/main" xmlns:r="http://schemas.openxmlformats.org/officeDocument/2006/relationships" xmlns:p="http://schemas.openxmlformats.org/presentationml/2006/main">
-  <p:cSld>
-    <p:spTree>
-      <p:nvGrpSpPr>
-        <p:cNvPr id="1" name=""/>
-        <p:cNvGrpSpPr/>
-        <p:nvPr/>
-      </p:nvGrpSpPr>
-      <p:grpSpPr>
-        <a:xfrm>
-          <a:off x="0" y="0"/>
-          <a:ext cx="0" cy="0"/>
-          <a:chOff x="0" y="0"/>
-          <a:chExt cx="0" cy="0"/>
-        </a:xfrm>
-      </p:grpSpPr>
-      <p:sp>
-        <p:nvSpPr>
-          <p:cNvPr id="2" name="Title 1">
-            <a:extLst>
-              <a:ext uri="{FF2B5EF4-FFF2-40B4-BE49-F238E27FC236}">
                 <a16:creationId xmlns:a16="http://schemas.microsoft.com/office/drawing/2014/main" id="{31614FC6-FE3D-7B45-84BE-3C726AB1D86B}"/>
               </a:ext>
             </a:extLst>
@@ -3427,7 +3582,7 @@
             </a:pPr>
             <a:r>
               <a:rPr lang="en-US" dirty="0"/>
-              <a:t>Name: [The presenter’s name]</a:t>
+              <a:t>Name: Sydney Morris</a:t>
             </a:r>
           </a:p>
           <a:p>
@@ -3441,7 +3596,7 @@
             </a:pPr>
             <a:r>
               <a:rPr lang="en-US" dirty="0"/>
-              <a:t>Title: [The presenter’s title]</a:t>
+              <a:t>Title: 10/28/2026 Biphasic Test Results</a:t>
             </a:r>
           </a:p>
           <a:p>
@@ -3455,29 +3610,7 @@
             </a:pPr>
             <a:r>
               <a:rPr lang="en-US" dirty="0"/>
-              <a:t>Email: [The presenter’s email]</a:t>
-            </a:r>
-          </a:p>
-          <a:p>
-            <a:pPr>
-              <a:lnSpc>
-                <a:spcPct val="100000"/>
-              </a:lnSpc>
-              <a:spcBef>
-                <a:spcPts val="0"/>
-              </a:spcBef>
-            </a:pPr>
-            <a:r>
-              <a:rPr lang="en-US" dirty="0"/>
-              <a:t>GitHub:[The presenter’s </a:t>
-            </a:r>
-            <a:r>
-              <a:rPr lang="en-US" dirty="0" err="1"/>
-              <a:t>github</a:t>
-            </a:r>
-            <a:r>
-              <a:rPr lang="en-US" dirty="0"/>
-              <a:t> or other relevant link]</a:t>
+              <a:t>Email: slm30@email.sc.edu</a:t>
             </a:r>
           </a:p>
         </p:txBody>
@@ -3802,6 +3935,1015 @@
       <p188:commentRel xmlns:p188="http://schemas.microsoft.com/office/powerpoint/2018/8/main" r:id="rId2"/>
     </p:ext>
   </p:extLst>
+</p:sld>
+</file>
+
+<file path=ppt/slides/slide2.xml><?xml version="1.0" encoding="utf-8"?>
+<p:sld xmlns:a="http://schemas.openxmlformats.org/drawingml/2006/main" xmlns:r="http://schemas.openxmlformats.org/officeDocument/2006/relationships" xmlns:p="http://schemas.openxmlformats.org/presentationml/2006/main">
+  <p:cSld>
+    <p:spTree>
+      <p:nvGrpSpPr>
+        <p:cNvPr id="1" name=""/>
+        <p:cNvGrpSpPr/>
+        <p:nvPr/>
+      </p:nvGrpSpPr>
+      <p:grpSpPr>
+        <a:xfrm>
+          <a:off x="0" y="0"/>
+          <a:ext cx="0" cy="0"/>
+          <a:chOff x="0" y="0"/>
+          <a:chExt cx="0" cy="0"/>
+        </a:xfrm>
+      </p:grpSpPr>
+      <p:sp>
+        <p:nvSpPr>
+          <p:cNvPr id="2" name="Title 1">
+            <a:extLst>
+              <a:ext uri="{FF2B5EF4-FFF2-40B4-BE49-F238E27FC236}">
+                <a16:creationId xmlns:a16="http://schemas.microsoft.com/office/drawing/2014/main" id="{336703AC-670E-A4B8-DA6D-85DC55E7A33B}"/>
+              </a:ext>
+            </a:extLst>
+          </p:cNvPr>
+          <p:cNvSpPr>
+            <a:spLocks noGrp="1"/>
+          </p:cNvSpPr>
+          <p:nvPr>
+            <p:ph type="title"/>
+          </p:nvPr>
+        </p:nvSpPr>
+        <p:spPr/>
+        <p:txBody>
+          <a:bodyPr/>
+          <a:lstStyle/>
+          <a:p>
+            <a:r>
+              <a:rPr lang="en-US" dirty="0"/>
+              <a:t>Section Break</a:t>
+            </a:r>
+          </a:p>
+        </p:txBody>
+      </p:sp>
+    </p:spTree>
+    <p:extLst>
+      <p:ext uri="{BB962C8B-B14F-4D97-AF65-F5344CB8AC3E}">
+        <p14:creationId xmlns:p14="http://schemas.microsoft.com/office/powerpoint/2010/main" val="4082244439"/>
+      </p:ext>
+    </p:extLst>
+  </p:cSld>
+  <p:clrMapOvr>
+    <a:masterClrMapping/>
+  </p:clrMapOvr>
+</p:sld>
+</file>
+
+<file path=ppt/slides/slide3.xml><?xml version="1.0" encoding="utf-8"?>
+<p:sld xmlns:a="http://schemas.openxmlformats.org/drawingml/2006/main" xmlns:r="http://schemas.openxmlformats.org/officeDocument/2006/relationships" xmlns:p="http://schemas.openxmlformats.org/presentationml/2006/main">
+  <p:cSld>
+    <p:spTree>
+      <p:nvGrpSpPr>
+        <p:cNvPr id="1" name=""/>
+        <p:cNvGrpSpPr/>
+        <p:nvPr/>
+      </p:nvGrpSpPr>
+      <p:grpSpPr>
+        <a:xfrm>
+          <a:off x="0" y="0"/>
+          <a:ext cx="0" cy="0"/>
+          <a:chOff x="0" y="0"/>
+          <a:chExt cx="0" cy="0"/>
+        </a:xfrm>
+      </p:grpSpPr>
+      <p:sp>
+        <p:nvSpPr>
+          <p:cNvPr id="2" name="Title 1">
+            <a:extLst>
+              <a:ext uri="{FF2B5EF4-FFF2-40B4-BE49-F238E27FC236}">
+                <a16:creationId xmlns:a16="http://schemas.microsoft.com/office/drawing/2014/main" id="{687E83B4-0509-9C55-5923-99915535EE1E}"/>
+              </a:ext>
+            </a:extLst>
+          </p:cNvPr>
+          <p:cNvSpPr>
+            <a:spLocks noGrp="1"/>
+          </p:cNvSpPr>
+          <p:nvPr>
+            <p:ph type="title"/>
+          </p:nvPr>
+        </p:nvSpPr>
+        <p:spPr/>
+        <p:txBody>
+          <a:bodyPr/>
+          <a:lstStyle/>
+          <a:p>
+            <a:r>
+              <a:rPr lang="en-US" dirty="0"/>
+              <a:t>Test Setup</a:t>
+            </a:r>
+          </a:p>
+        </p:txBody>
+      </p:sp>
+      <p:sp>
+        <p:nvSpPr>
+          <p:cNvPr id="3" name="Content Placeholder 2">
+            <a:extLst>
+              <a:ext uri="{FF2B5EF4-FFF2-40B4-BE49-F238E27FC236}">
+                <a16:creationId xmlns:a16="http://schemas.microsoft.com/office/drawing/2014/main" id="{19A0C4AC-E0F9-23AB-B464-7B04810ACB71}"/>
+              </a:ext>
+            </a:extLst>
+          </p:cNvPr>
+          <p:cNvSpPr>
+            <a:spLocks noGrp="1"/>
+          </p:cNvSpPr>
+          <p:nvPr>
+            <p:ph sz="half" idx="1"/>
+          </p:nvPr>
+        </p:nvSpPr>
+        <p:spPr/>
+        <p:txBody>
+          <a:bodyPr/>
+          <a:lstStyle/>
+          <a:p>
+            <a:endParaRPr lang="en-US"/>
+          </a:p>
+        </p:txBody>
+      </p:sp>
+      <p:sp>
+        <p:nvSpPr>
+          <p:cNvPr id="4" name="Content Placeholder 3">
+            <a:extLst>
+              <a:ext uri="{FF2B5EF4-FFF2-40B4-BE49-F238E27FC236}">
+                <a16:creationId xmlns:a16="http://schemas.microsoft.com/office/drawing/2014/main" id="{C16C2CD3-28C2-5F63-BAFA-E9FA17907AC7}"/>
+              </a:ext>
+            </a:extLst>
+          </p:cNvPr>
+          <p:cNvSpPr>
+            <a:spLocks noGrp="1"/>
+          </p:cNvSpPr>
+          <p:nvPr>
+            <p:ph sz="half" idx="2"/>
+          </p:nvPr>
+        </p:nvSpPr>
+        <p:spPr/>
+        <p:txBody>
+          <a:bodyPr/>
+          <a:lstStyle/>
+          <a:p>
+            <a:endParaRPr lang="en-US"/>
+          </a:p>
+        </p:txBody>
+      </p:sp>
+      <p:sp>
+        <p:nvSpPr>
+          <p:cNvPr id="5" name="Slide Number Placeholder 4">
+            <a:extLst>
+              <a:ext uri="{FF2B5EF4-FFF2-40B4-BE49-F238E27FC236}">
+                <a16:creationId xmlns:a16="http://schemas.microsoft.com/office/drawing/2014/main" id="{5FBDD2AC-E4D3-CA9E-855E-8EE42A12C936}"/>
+              </a:ext>
+            </a:extLst>
+          </p:cNvPr>
+          <p:cNvSpPr>
+            <a:spLocks noGrp="1"/>
+          </p:cNvSpPr>
+          <p:nvPr>
+            <p:ph type="sldNum" sz="quarter" idx="12"/>
+          </p:nvPr>
+        </p:nvSpPr>
+        <p:spPr/>
+        <p:txBody>
+          <a:bodyPr/>
+          <a:lstStyle/>
+          <a:p>
+            <a:fld id="{B4E9AFF7-6653-6A4D-A979-64D2F5BECA26}" type="slidenum">
+              <a:rPr lang="en-US" smtClean="0"/>
+              <a:t>3</a:t>
+            </a:fld>
+            <a:endParaRPr lang="en-US"/>
+          </a:p>
+        </p:txBody>
+      </p:sp>
+    </p:spTree>
+    <p:extLst>
+      <p:ext uri="{BB962C8B-B14F-4D97-AF65-F5344CB8AC3E}">
+        <p14:creationId xmlns:p14="http://schemas.microsoft.com/office/powerpoint/2010/main" val="4115979984"/>
+      </p:ext>
+    </p:extLst>
+  </p:cSld>
+  <p:clrMapOvr>
+    <a:masterClrMapping/>
+  </p:clrMapOvr>
+</p:sld>
+</file>
+
+<file path=ppt/slides/slide4.xml><?xml version="1.0" encoding="utf-8"?>
+<p:sld xmlns:a="http://schemas.openxmlformats.org/drawingml/2006/main" xmlns:r="http://schemas.openxmlformats.org/officeDocument/2006/relationships" xmlns:p="http://schemas.openxmlformats.org/presentationml/2006/main">
+  <p:cSld>
+    <p:spTree>
+      <p:nvGrpSpPr>
+        <p:cNvPr id="1" name=""/>
+        <p:cNvGrpSpPr/>
+        <p:nvPr/>
+      </p:nvGrpSpPr>
+      <p:grpSpPr>
+        <a:xfrm>
+          <a:off x="0" y="0"/>
+          <a:ext cx="0" cy="0"/>
+          <a:chOff x="0" y="0"/>
+          <a:chExt cx="0" cy="0"/>
+        </a:xfrm>
+      </p:grpSpPr>
+      <p:sp>
+        <p:nvSpPr>
+          <p:cNvPr id="2" name="Title 1">
+            <a:extLst>
+              <a:ext uri="{FF2B5EF4-FFF2-40B4-BE49-F238E27FC236}">
+                <a16:creationId xmlns:a16="http://schemas.microsoft.com/office/drawing/2014/main" id="{B3BA3878-57F0-E7C6-608E-66E745A6DB7B}"/>
+              </a:ext>
+            </a:extLst>
+          </p:cNvPr>
+          <p:cNvSpPr>
+            <a:spLocks noGrp="1"/>
+          </p:cNvSpPr>
+          <p:nvPr>
+            <p:ph type="title"/>
+          </p:nvPr>
+        </p:nvSpPr>
+        <p:spPr/>
+        <p:txBody>
+          <a:bodyPr/>
+          <a:lstStyle/>
+          <a:p>
+            <a:r>
+              <a:rPr lang="en-US" dirty="0"/>
+              <a:t>Test Procedure</a:t>
+            </a:r>
+          </a:p>
+        </p:txBody>
+      </p:sp>
+      <p:sp>
+        <p:nvSpPr>
+          <p:cNvPr id="3" name="Content Placeholder 2">
+            <a:extLst>
+              <a:ext uri="{FF2B5EF4-FFF2-40B4-BE49-F238E27FC236}">
+                <a16:creationId xmlns:a16="http://schemas.microsoft.com/office/drawing/2014/main" id="{770EEC3B-F35D-A4C7-769E-CF68EEC151FE}"/>
+              </a:ext>
+            </a:extLst>
+          </p:cNvPr>
+          <p:cNvSpPr>
+            <a:spLocks noGrp="1"/>
+          </p:cNvSpPr>
+          <p:nvPr>
+            <p:ph sz="half" idx="1"/>
+          </p:nvPr>
+        </p:nvSpPr>
+        <p:spPr/>
+        <p:txBody>
+          <a:bodyPr/>
+          <a:lstStyle/>
+          <a:p>
+            <a:endParaRPr lang="en-US"/>
+          </a:p>
+        </p:txBody>
+      </p:sp>
+      <p:sp>
+        <p:nvSpPr>
+          <p:cNvPr id="4" name="Content Placeholder 3">
+            <a:extLst>
+              <a:ext uri="{FF2B5EF4-FFF2-40B4-BE49-F238E27FC236}">
+                <a16:creationId xmlns:a16="http://schemas.microsoft.com/office/drawing/2014/main" id="{A12E79C8-DCBC-C9F3-1268-EBC0452A5318}"/>
+              </a:ext>
+            </a:extLst>
+          </p:cNvPr>
+          <p:cNvSpPr>
+            <a:spLocks noGrp="1"/>
+          </p:cNvSpPr>
+          <p:nvPr>
+            <p:ph sz="half" idx="2"/>
+          </p:nvPr>
+        </p:nvSpPr>
+        <p:spPr/>
+        <p:txBody>
+          <a:bodyPr/>
+          <a:lstStyle/>
+          <a:p>
+            <a:endParaRPr lang="en-US"/>
+          </a:p>
+        </p:txBody>
+      </p:sp>
+      <p:sp>
+        <p:nvSpPr>
+          <p:cNvPr id="5" name="Slide Number Placeholder 4">
+            <a:extLst>
+              <a:ext uri="{FF2B5EF4-FFF2-40B4-BE49-F238E27FC236}">
+                <a16:creationId xmlns:a16="http://schemas.microsoft.com/office/drawing/2014/main" id="{A720EB8B-6BF4-5DD2-8D0F-CD5FF082A36E}"/>
+              </a:ext>
+            </a:extLst>
+          </p:cNvPr>
+          <p:cNvSpPr>
+            <a:spLocks noGrp="1"/>
+          </p:cNvSpPr>
+          <p:nvPr>
+            <p:ph type="sldNum" sz="quarter" idx="12"/>
+          </p:nvPr>
+        </p:nvSpPr>
+        <p:spPr/>
+        <p:txBody>
+          <a:bodyPr/>
+          <a:lstStyle/>
+          <a:p>
+            <a:fld id="{B4E9AFF7-6653-6A4D-A979-64D2F5BECA26}" type="slidenum">
+              <a:rPr lang="en-US" smtClean="0"/>
+              <a:t>4</a:t>
+            </a:fld>
+            <a:endParaRPr lang="en-US"/>
+          </a:p>
+        </p:txBody>
+      </p:sp>
+    </p:spTree>
+    <p:extLst>
+      <p:ext uri="{BB962C8B-B14F-4D97-AF65-F5344CB8AC3E}">
+        <p14:creationId xmlns:p14="http://schemas.microsoft.com/office/powerpoint/2010/main" val="3939459109"/>
+      </p:ext>
+    </p:extLst>
+  </p:cSld>
+  <p:clrMapOvr>
+    <a:masterClrMapping/>
+  </p:clrMapOvr>
+</p:sld>
+</file>
+
+<file path=ppt/slides/slide5.xml><?xml version="1.0" encoding="utf-8"?>
+<p:sld xmlns:a="http://schemas.openxmlformats.org/drawingml/2006/main" xmlns:r="http://schemas.openxmlformats.org/officeDocument/2006/relationships" xmlns:p="http://schemas.openxmlformats.org/presentationml/2006/main">
+  <p:cSld>
+    <p:spTree>
+      <p:nvGrpSpPr>
+        <p:cNvPr id="1" name=""/>
+        <p:cNvGrpSpPr/>
+        <p:nvPr/>
+      </p:nvGrpSpPr>
+      <p:grpSpPr>
+        <a:xfrm>
+          <a:off x="0" y="0"/>
+          <a:ext cx="0" cy="0"/>
+          <a:chOff x="0" y="0"/>
+          <a:chExt cx="0" cy="0"/>
+        </a:xfrm>
+      </p:grpSpPr>
+      <p:sp>
+        <p:nvSpPr>
+          <p:cNvPr id="2" name="Title 1">
+            <a:extLst>
+              <a:ext uri="{FF2B5EF4-FFF2-40B4-BE49-F238E27FC236}">
+                <a16:creationId xmlns:a16="http://schemas.microsoft.com/office/drawing/2014/main" id="{40D9F20D-37E0-6C63-ADE5-9C60C55F8A06}"/>
+              </a:ext>
+            </a:extLst>
+          </p:cNvPr>
+          <p:cNvSpPr>
+            <a:spLocks noGrp="1"/>
+          </p:cNvSpPr>
+          <p:nvPr>
+            <p:ph type="title"/>
+          </p:nvPr>
+        </p:nvSpPr>
+        <p:spPr/>
+        <p:txBody>
+          <a:bodyPr/>
+          <a:lstStyle/>
+          <a:p>
+            <a:r>
+              <a:rPr lang="en-US" dirty="0"/>
+              <a:t>Overall Curves</a:t>
+            </a:r>
+          </a:p>
+        </p:txBody>
+      </p:sp>
+      <p:sp>
+        <p:nvSpPr>
+          <p:cNvPr id="3" name="Content Placeholder 2">
+            <a:extLst>
+              <a:ext uri="{FF2B5EF4-FFF2-40B4-BE49-F238E27FC236}">
+                <a16:creationId xmlns:a16="http://schemas.microsoft.com/office/drawing/2014/main" id="{CAC01243-2208-2679-FAC7-1F79824A90C9}"/>
+              </a:ext>
+            </a:extLst>
+          </p:cNvPr>
+          <p:cNvSpPr>
+            <a:spLocks noGrp="1"/>
+          </p:cNvSpPr>
+          <p:nvPr>
+            <p:ph sz="half" idx="1"/>
+          </p:nvPr>
+        </p:nvSpPr>
+        <p:spPr/>
+        <p:txBody>
+          <a:bodyPr/>
+          <a:lstStyle/>
+          <a:p>
+            <a:r>
+              <a:rPr lang="en-US" dirty="0"/>
+              <a:t>Bullet number one</a:t>
+            </a:r>
+          </a:p>
+          <a:p>
+            <a:r>
+              <a:rPr lang="en-US" dirty="0"/>
+              <a:t>A second bullet</a:t>
+            </a:r>
+          </a:p>
+          <a:p>
+            <a:r>
+              <a:rPr lang="en-US" dirty="0"/>
+              <a:t>A final, third bullet</a:t>
+            </a:r>
+          </a:p>
+          <a:p>
+            <a:endParaRPr lang="en-US" dirty="0"/>
+          </a:p>
+        </p:txBody>
+      </p:sp>
+      <p:sp>
+        <p:nvSpPr>
+          <p:cNvPr id="4" name="Content Placeholder 3">
+            <a:extLst>
+              <a:ext uri="{FF2B5EF4-FFF2-40B4-BE49-F238E27FC236}">
+                <a16:creationId xmlns:a16="http://schemas.microsoft.com/office/drawing/2014/main" id="{C61B207A-02DF-2B56-07F8-69842B42FCD9}"/>
+              </a:ext>
+            </a:extLst>
+          </p:cNvPr>
+          <p:cNvSpPr>
+            <a:spLocks noGrp="1"/>
+          </p:cNvSpPr>
+          <p:nvPr>
+            <p:ph sz="half" idx="2"/>
+          </p:nvPr>
+        </p:nvSpPr>
+        <p:spPr/>
+        <p:txBody>
+          <a:bodyPr/>
+          <a:lstStyle/>
+          <a:p>
+            <a:r>
+              <a:rPr lang="en-US" dirty="0"/>
+              <a:t>Bullet number one</a:t>
+            </a:r>
+          </a:p>
+          <a:p>
+            <a:r>
+              <a:rPr lang="en-US" dirty="0"/>
+              <a:t>A second bullet</a:t>
+            </a:r>
+          </a:p>
+          <a:p>
+            <a:r>
+              <a:rPr lang="en-US" dirty="0"/>
+              <a:t>A final, third bullet</a:t>
+            </a:r>
+          </a:p>
+          <a:p>
+            <a:endParaRPr lang="en-US" dirty="0"/>
+          </a:p>
+        </p:txBody>
+      </p:sp>
+      <p:sp>
+        <p:nvSpPr>
+          <p:cNvPr id="5" name="Slide Number Placeholder 4">
+            <a:extLst>
+              <a:ext uri="{FF2B5EF4-FFF2-40B4-BE49-F238E27FC236}">
+                <a16:creationId xmlns:a16="http://schemas.microsoft.com/office/drawing/2014/main" id="{D4784A06-4452-76C2-E9CF-B1F57F1062CB}"/>
+              </a:ext>
+            </a:extLst>
+          </p:cNvPr>
+          <p:cNvSpPr>
+            <a:spLocks noGrp="1"/>
+          </p:cNvSpPr>
+          <p:nvPr>
+            <p:ph type="sldNum" sz="quarter" idx="12"/>
+          </p:nvPr>
+        </p:nvSpPr>
+        <p:spPr/>
+        <p:txBody>
+          <a:bodyPr/>
+          <a:lstStyle/>
+          <a:p>
+            <a:fld id="{B4E9AFF7-6653-6A4D-A979-64D2F5BECA26}" type="slidenum">
+              <a:rPr lang="en-US" smtClean="0"/>
+              <a:t>5</a:t>
+            </a:fld>
+            <a:endParaRPr lang="en-US"/>
+          </a:p>
+        </p:txBody>
+      </p:sp>
+    </p:spTree>
+    <p:extLst>
+      <p:ext uri="{BB962C8B-B14F-4D97-AF65-F5344CB8AC3E}">
+        <p14:creationId xmlns:p14="http://schemas.microsoft.com/office/powerpoint/2010/main" val="2202368894"/>
+      </p:ext>
+    </p:extLst>
+  </p:cSld>
+  <p:clrMapOvr>
+    <a:masterClrMapping/>
+  </p:clrMapOvr>
+</p:sld>
+</file>
+
+<file path=ppt/slides/slide6.xml><?xml version="1.0" encoding="utf-8"?>
+<p:sld xmlns:a="http://schemas.openxmlformats.org/drawingml/2006/main" xmlns:r="http://schemas.openxmlformats.org/officeDocument/2006/relationships" xmlns:p="http://schemas.openxmlformats.org/presentationml/2006/main">
+  <p:cSld>
+    <p:spTree>
+      <p:nvGrpSpPr>
+        <p:cNvPr id="1" name="">
+          <a:extLst>
+            <a:ext uri="{FF2B5EF4-FFF2-40B4-BE49-F238E27FC236}">
+              <a16:creationId xmlns:a16="http://schemas.microsoft.com/office/drawing/2014/main" id="{19532CD5-C25A-5D4B-6165-566469CF9DFD}"/>
+            </a:ext>
+          </a:extLst>
+        </p:cNvPr>
+        <p:cNvGrpSpPr/>
+        <p:nvPr/>
+      </p:nvGrpSpPr>
+      <p:grpSpPr>
+        <a:xfrm>
+          <a:off x="0" y="0"/>
+          <a:ext cx="0" cy="0"/>
+          <a:chOff x="0" y="0"/>
+          <a:chExt cx="0" cy="0"/>
+        </a:xfrm>
+      </p:grpSpPr>
+      <p:sp>
+        <p:nvSpPr>
+          <p:cNvPr id="2" name="Title 1">
+            <a:extLst>
+              <a:ext uri="{FF2B5EF4-FFF2-40B4-BE49-F238E27FC236}">
+                <a16:creationId xmlns:a16="http://schemas.microsoft.com/office/drawing/2014/main" id="{37DF280D-7ED5-BC03-D78C-45113F767353}"/>
+              </a:ext>
+            </a:extLst>
+          </p:cNvPr>
+          <p:cNvSpPr>
+            <a:spLocks noGrp="1"/>
+          </p:cNvSpPr>
+          <p:nvPr>
+            <p:ph type="title"/>
+          </p:nvPr>
+        </p:nvSpPr>
+        <p:spPr/>
+        <p:txBody>
+          <a:bodyPr>
+            <a:normAutofit fontScale="90000"/>
+          </a:bodyPr>
+          <a:lstStyle/>
+          <a:p>
+            <a:r>
+              <a:rPr lang="en-US" dirty="0"/>
+              <a:t>Individual Results:</a:t>
+            </a:r>
+            <a:br>
+              <a:rPr lang="en-US" dirty="0"/>
+            </a:br>
+            <a:r>
+              <a:rPr lang="en-US" dirty="0"/>
+              <a:t>33k</a:t>
+            </a:r>
+            <a:r>
+              <a:rPr lang="el-GR" dirty="0"/>
+              <a:t>Ω</a:t>
+            </a:r>
+            <a:br>
+              <a:rPr lang="en-US" dirty="0"/>
+            </a:br>
+            <a:endParaRPr lang="en-US" dirty="0"/>
+          </a:p>
+        </p:txBody>
+      </p:sp>
+    </p:spTree>
+    <p:extLst>
+      <p:ext uri="{BB962C8B-B14F-4D97-AF65-F5344CB8AC3E}">
+        <p14:creationId xmlns:p14="http://schemas.microsoft.com/office/powerpoint/2010/main" val="3013089025"/>
+      </p:ext>
+    </p:extLst>
+  </p:cSld>
+  <p:clrMapOvr>
+    <a:masterClrMapping/>
+  </p:clrMapOvr>
+</p:sld>
+</file>
+
+<file path=ppt/slides/slide7.xml><?xml version="1.0" encoding="utf-8"?>
+<p:sld xmlns:a="http://schemas.openxmlformats.org/drawingml/2006/main" xmlns:r="http://schemas.openxmlformats.org/officeDocument/2006/relationships" xmlns:p="http://schemas.openxmlformats.org/presentationml/2006/main">
+  <p:cSld>
+    <p:spTree>
+      <p:nvGrpSpPr>
+        <p:cNvPr id="1" name=""/>
+        <p:cNvGrpSpPr/>
+        <p:nvPr/>
+      </p:nvGrpSpPr>
+      <p:grpSpPr>
+        <a:xfrm>
+          <a:off x="0" y="0"/>
+          <a:ext cx="0" cy="0"/>
+          <a:chOff x="0" y="0"/>
+          <a:chExt cx="0" cy="0"/>
+        </a:xfrm>
+      </p:grpSpPr>
+      <p:sp>
+        <p:nvSpPr>
+          <p:cNvPr id="2" name="Title 1">
+            <a:extLst>
+              <a:ext uri="{FF2B5EF4-FFF2-40B4-BE49-F238E27FC236}">
+                <a16:creationId xmlns:a16="http://schemas.microsoft.com/office/drawing/2014/main" id="{D5D8A081-51D5-6440-9C25-198B64156D06}"/>
+              </a:ext>
+            </a:extLst>
+          </p:cNvPr>
+          <p:cNvSpPr>
+            <a:spLocks noGrp="1"/>
+          </p:cNvSpPr>
+          <p:nvPr>
+            <p:ph type="title"/>
+          </p:nvPr>
+        </p:nvSpPr>
+        <p:spPr/>
+        <p:txBody>
+          <a:bodyPr/>
+          <a:lstStyle/>
+          <a:p>
+            <a:r>
+              <a:rPr lang="en-US" dirty="0"/>
+              <a:t>33k-5Hz</a:t>
+            </a:r>
+          </a:p>
+        </p:txBody>
+      </p:sp>
+      <p:sp>
+        <p:nvSpPr>
+          <p:cNvPr id="3" name="Content Placeholder 2">
+            <a:extLst>
+              <a:ext uri="{FF2B5EF4-FFF2-40B4-BE49-F238E27FC236}">
+                <a16:creationId xmlns:a16="http://schemas.microsoft.com/office/drawing/2014/main" id="{041DA395-0C0A-77A2-48BA-87AF91DA1F0C}"/>
+              </a:ext>
+            </a:extLst>
+          </p:cNvPr>
+          <p:cNvSpPr>
+            <a:spLocks noGrp="1"/>
+          </p:cNvSpPr>
+          <p:nvPr>
+            <p:ph sz="half" idx="1"/>
+          </p:nvPr>
+        </p:nvSpPr>
+        <p:spPr/>
+        <p:txBody>
+          <a:bodyPr/>
+          <a:lstStyle/>
+          <a:p>
+            <a:endParaRPr lang="en-US"/>
+          </a:p>
+        </p:txBody>
+      </p:sp>
+      <p:sp>
+        <p:nvSpPr>
+          <p:cNvPr id="4" name="Content Placeholder 3">
+            <a:extLst>
+              <a:ext uri="{FF2B5EF4-FFF2-40B4-BE49-F238E27FC236}">
+                <a16:creationId xmlns:a16="http://schemas.microsoft.com/office/drawing/2014/main" id="{193B6BAB-7ECA-D0A9-BB25-CFC37DC0B171}"/>
+              </a:ext>
+            </a:extLst>
+          </p:cNvPr>
+          <p:cNvSpPr>
+            <a:spLocks noGrp="1"/>
+          </p:cNvSpPr>
+          <p:nvPr>
+            <p:ph sz="half" idx="2"/>
+          </p:nvPr>
+        </p:nvSpPr>
+        <p:spPr/>
+        <p:txBody>
+          <a:bodyPr/>
+          <a:lstStyle/>
+          <a:p>
+            <a:endParaRPr lang="en-US"/>
+          </a:p>
+        </p:txBody>
+      </p:sp>
+      <p:sp>
+        <p:nvSpPr>
+          <p:cNvPr id="5" name="Slide Number Placeholder 4">
+            <a:extLst>
+              <a:ext uri="{FF2B5EF4-FFF2-40B4-BE49-F238E27FC236}">
+                <a16:creationId xmlns:a16="http://schemas.microsoft.com/office/drawing/2014/main" id="{A3474B96-B3DF-9F11-E97C-48405B26CE78}"/>
+              </a:ext>
+            </a:extLst>
+          </p:cNvPr>
+          <p:cNvSpPr>
+            <a:spLocks noGrp="1"/>
+          </p:cNvSpPr>
+          <p:nvPr>
+            <p:ph type="sldNum" sz="quarter" idx="12"/>
+          </p:nvPr>
+        </p:nvSpPr>
+        <p:spPr/>
+        <p:txBody>
+          <a:bodyPr/>
+          <a:lstStyle/>
+          <a:p>
+            <a:fld id="{B4E9AFF7-6653-6A4D-A979-64D2F5BECA26}" type="slidenum">
+              <a:rPr lang="en-US" smtClean="0"/>
+              <a:t>7</a:t>
+            </a:fld>
+            <a:endParaRPr lang="en-US"/>
+          </a:p>
+        </p:txBody>
+      </p:sp>
+    </p:spTree>
+    <p:extLst>
+      <p:ext uri="{BB962C8B-B14F-4D97-AF65-F5344CB8AC3E}">
+        <p14:creationId xmlns:p14="http://schemas.microsoft.com/office/powerpoint/2010/main" val="3687908199"/>
+      </p:ext>
+    </p:extLst>
+  </p:cSld>
+  <p:clrMapOvr>
+    <a:masterClrMapping/>
+  </p:clrMapOvr>
+</p:sld>
+</file>
+
+<file path=ppt/slides/slide8.xml><?xml version="1.0" encoding="utf-8"?>
+<p:sld xmlns:a="http://schemas.openxmlformats.org/drawingml/2006/main" xmlns:r="http://schemas.openxmlformats.org/officeDocument/2006/relationships" xmlns:p="http://schemas.openxmlformats.org/presentationml/2006/main">
+  <p:cSld>
+    <p:spTree>
+      <p:nvGrpSpPr>
+        <p:cNvPr id="1" name="">
+          <a:extLst>
+            <a:ext uri="{FF2B5EF4-FFF2-40B4-BE49-F238E27FC236}">
+              <a16:creationId xmlns:a16="http://schemas.microsoft.com/office/drawing/2014/main" id="{3C863FEB-D01E-525C-537B-4E854EC60BF1}"/>
+            </a:ext>
+          </a:extLst>
+        </p:cNvPr>
+        <p:cNvGrpSpPr/>
+        <p:nvPr/>
+      </p:nvGrpSpPr>
+      <p:grpSpPr>
+        <a:xfrm>
+          <a:off x="0" y="0"/>
+          <a:ext cx="0" cy="0"/>
+          <a:chOff x="0" y="0"/>
+          <a:chExt cx="0" cy="0"/>
+        </a:xfrm>
+      </p:grpSpPr>
+      <p:sp>
+        <p:nvSpPr>
+          <p:cNvPr id="2" name="Title 1">
+            <a:extLst>
+              <a:ext uri="{FF2B5EF4-FFF2-40B4-BE49-F238E27FC236}">
+                <a16:creationId xmlns:a16="http://schemas.microsoft.com/office/drawing/2014/main" id="{5A2C7BFD-D20B-DBA3-D46D-3214CCA51931}"/>
+              </a:ext>
+            </a:extLst>
+          </p:cNvPr>
+          <p:cNvSpPr>
+            <a:spLocks noGrp="1"/>
+          </p:cNvSpPr>
+          <p:nvPr>
+            <p:ph type="title"/>
+          </p:nvPr>
+        </p:nvSpPr>
+        <p:spPr/>
+        <p:txBody>
+          <a:bodyPr/>
+          <a:lstStyle/>
+          <a:p>
+            <a:r>
+              <a:rPr lang="en-US" dirty="0"/>
+              <a:t>33k-10Hz</a:t>
+            </a:r>
+          </a:p>
+        </p:txBody>
+      </p:sp>
+      <p:sp>
+        <p:nvSpPr>
+          <p:cNvPr id="3" name="Content Placeholder 2">
+            <a:extLst>
+              <a:ext uri="{FF2B5EF4-FFF2-40B4-BE49-F238E27FC236}">
+                <a16:creationId xmlns:a16="http://schemas.microsoft.com/office/drawing/2014/main" id="{B9C6A7C6-5E21-DA66-B1B6-BF5AFC3FE64A}"/>
+              </a:ext>
+            </a:extLst>
+          </p:cNvPr>
+          <p:cNvSpPr>
+            <a:spLocks noGrp="1"/>
+          </p:cNvSpPr>
+          <p:nvPr>
+            <p:ph sz="half" idx="1"/>
+          </p:nvPr>
+        </p:nvSpPr>
+        <p:spPr/>
+        <p:txBody>
+          <a:bodyPr/>
+          <a:lstStyle/>
+          <a:p>
+            <a:endParaRPr lang="en-US"/>
+          </a:p>
+        </p:txBody>
+      </p:sp>
+      <p:sp>
+        <p:nvSpPr>
+          <p:cNvPr id="4" name="Content Placeholder 3">
+            <a:extLst>
+              <a:ext uri="{FF2B5EF4-FFF2-40B4-BE49-F238E27FC236}">
+                <a16:creationId xmlns:a16="http://schemas.microsoft.com/office/drawing/2014/main" id="{9CC5A372-5995-D681-5617-4013A0F4C882}"/>
+              </a:ext>
+            </a:extLst>
+          </p:cNvPr>
+          <p:cNvSpPr>
+            <a:spLocks noGrp="1"/>
+          </p:cNvSpPr>
+          <p:nvPr>
+            <p:ph sz="half" idx="2"/>
+          </p:nvPr>
+        </p:nvSpPr>
+        <p:spPr/>
+        <p:txBody>
+          <a:bodyPr/>
+          <a:lstStyle/>
+          <a:p>
+            <a:endParaRPr lang="en-US"/>
+          </a:p>
+        </p:txBody>
+      </p:sp>
+      <p:sp>
+        <p:nvSpPr>
+          <p:cNvPr id="5" name="Slide Number Placeholder 4">
+            <a:extLst>
+              <a:ext uri="{FF2B5EF4-FFF2-40B4-BE49-F238E27FC236}">
+                <a16:creationId xmlns:a16="http://schemas.microsoft.com/office/drawing/2014/main" id="{B7D1D684-6879-59C0-B25F-D48B5075ECB0}"/>
+              </a:ext>
+            </a:extLst>
+          </p:cNvPr>
+          <p:cNvSpPr>
+            <a:spLocks noGrp="1"/>
+          </p:cNvSpPr>
+          <p:nvPr>
+            <p:ph type="sldNum" sz="quarter" idx="12"/>
+          </p:nvPr>
+        </p:nvSpPr>
+        <p:spPr/>
+        <p:txBody>
+          <a:bodyPr/>
+          <a:lstStyle/>
+          <a:p>
+            <a:fld id="{B4E9AFF7-6653-6A4D-A979-64D2F5BECA26}" type="slidenum">
+              <a:rPr lang="en-US" smtClean="0"/>
+              <a:t>8</a:t>
+            </a:fld>
+            <a:endParaRPr lang="en-US"/>
+          </a:p>
+        </p:txBody>
+      </p:sp>
+    </p:spTree>
+    <p:extLst>
+      <p:ext uri="{BB962C8B-B14F-4D97-AF65-F5344CB8AC3E}">
+        <p14:creationId xmlns:p14="http://schemas.microsoft.com/office/powerpoint/2010/main" val="1962221315"/>
+      </p:ext>
+    </p:extLst>
+  </p:cSld>
+  <p:clrMapOvr>
+    <a:masterClrMapping/>
+  </p:clrMapOvr>
+</p:sld>
+</file>
+
+<file path=ppt/slides/slide9.xml><?xml version="1.0" encoding="utf-8"?>
+<p:sld xmlns:a="http://schemas.openxmlformats.org/drawingml/2006/main" xmlns:r="http://schemas.openxmlformats.org/officeDocument/2006/relationships" xmlns:p="http://schemas.openxmlformats.org/presentationml/2006/main">
+  <p:cSld>
+    <p:spTree>
+      <p:nvGrpSpPr>
+        <p:cNvPr id="1" name="">
+          <a:extLst>
+            <a:ext uri="{FF2B5EF4-FFF2-40B4-BE49-F238E27FC236}">
+              <a16:creationId xmlns:a16="http://schemas.microsoft.com/office/drawing/2014/main" id="{946ADA9A-8A7B-A686-754E-5CAECCE0918C}"/>
+            </a:ext>
+          </a:extLst>
+        </p:cNvPr>
+        <p:cNvGrpSpPr/>
+        <p:nvPr/>
+      </p:nvGrpSpPr>
+      <p:grpSpPr>
+        <a:xfrm>
+          <a:off x="0" y="0"/>
+          <a:ext cx="0" cy="0"/>
+          <a:chOff x="0" y="0"/>
+          <a:chExt cx="0" cy="0"/>
+        </a:xfrm>
+      </p:grpSpPr>
+      <p:sp>
+        <p:nvSpPr>
+          <p:cNvPr id="2" name="Title 1">
+            <a:extLst>
+              <a:ext uri="{FF2B5EF4-FFF2-40B4-BE49-F238E27FC236}">
+                <a16:creationId xmlns:a16="http://schemas.microsoft.com/office/drawing/2014/main" id="{57C8BDFC-0745-ADD1-A90B-D1F1D33E2CBA}"/>
+              </a:ext>
+            </a:extLst>
+          </p:cNvPr>
+          <p:cNvSpPr>
+            <a:spLocks noGrp="1"/>
+          </p:cNvSpPr>
+          <p:nvPr>
+            <p:ph type="title"/>
+          </p:nvPr>
+        </p:nvSpPr>
+        <p:spPr/>
+        <p:txBody>
+          <a:bodyPr/>
+          <a:lstStyle/>
+          <a:p>
+            <a:r>
+              <a:rPr lang="en-US" dirty="0"/>
+              <a:t>33k-20Hz</a:t>
+            </a:r>
+          </a:p>
+        </p:txBody>
+      </p:sp>
+      <p:sp>
+        <p:nvSpPr>
+          <p:cNvPr id="3" name="Content Placeholder 2">
+            <a:extLst>
+              <a:ext uri="{FF2B5EF4-FFF2-40B4-BE49-F238E27FC236}">
+                <a16:creationId xmlns:a16="http://schemas.microsoft.com/office/drawing/2014/main" id="{E03C7444-DE5C-3967-3BEC-769090748D98}"/>
+              </a:ext>
+            </a:extLst>
+          </p:cNvPr>
+          <p:cNvSpPr>
+            <a:spLocks noGrp="1"/>
+          </p:cNvSpPr>
+          <p:nvPr>
+            <p:ph sz="half" idx="1"/>
+          </p:nvPr>
+        </p:nvSpPr>
+        <p:spPr/>
+        <p:txBody>
+          <a:bodyPr/>
+          <a:lstStyle/>
+          <a:p>
+            <a:endParaRPr lang="en-US"/>
+          </a:p>
+        </p:txBody>
+      </p:sp>
+      <p:sp>
+        <p:nvSpPr>
+          <p:cNvPr id="4" name="Content Placeholder 3">
+            <a:extLst>
+              <a:ext uri="{FF2B5EF4-FFF2-40B4-BE49-F238E27FC236}">
+                <a16:creationId xmlns:a16="http://schemas.microsoft.com/office/drawing/2014/main" id="{E64939BB-22DF-99F4-0ECB-6E834B12E754}"/>
+              </a:ext>
+            </a:extLst>
+          </p:cNvPr>
+          <p:cNvSpPr>
+            <a:spLocks noGrp="1"/>
+          </p:cNvSpPr>
+          <p:nvPr>
+            <p:ph sz="half" idx="2"/>
+          </p:nvPr>
+        </p:nvSpPr>
+        <p:spPr/>
+        <p:txBody>
+          <a:bodyPr/>
+          <a:lstStyle/>
+          <a:p>
+            <a:endParaRPr lang="en-US"/>
+          </a:p>
+        </p:txBody>
+      </p:sp>
+      <p:sp>
+        <p:nvSpPr>
+          <p:cNvPr id="5" name="Slide Number Placeholder 4">
+            <a:extLst>
+              <a:ext uri="{FF2B5EF4-FFF2-40B4-BE49-F238E27FC236}">
+                <a16:creationId xmlns:a16="http://schemas.microsoft.com/office/drawing/2014/main" id="{63596461-2C05-0F51-BC24-2CD3325B8084}"/>
+              </a:ext>
+            </a:extLst>
+          </p:cNvPr>
+          <p:cNvSpPr>
+            <a:spLocks noGrp="1"/>
+          </p:cNvSpPr>
+          <p:nvPr>
+            <p:ph type="sldNum" sz="quarter" idx="12"/>
+          </p:nvPr>
+        </p:nvSpPr>
+        <p:spPr/>
+        <p:txBody>
+          <a:bodyPr/>
+          <a:lstStyle/>
+          <a:p>
+            <a:fld id="{B4E9AFF7-6653-6A4D-A979-64D2F5BECA26}" type="slidenum">
+              <a:rPr lang="en-US" smtClean="0"/>
+              <a:t>9</a:t>
+            </a:fld>
+            <a:endParaRPr lang="en-US"/>
+          </a:p>
+        </p:txBody>
+      </p:sp>
+    </p:spTree>
+    <p:extLst>
+      <p:ext uri="{BB962C8B-B14F-4D97-AF65-F5344CB8AC3E}">
+        <p14:creationId xmlns:p14="http://schemas.microsoft.com/office/powerpoint/2010/main" val="581855163"/>
+      </p:ext>
+    </p:extLst>
+  </p:cSld>
+  <p:clrMapOvr>
+    <a:masterClrMapping/>
+  </p:clrMapOvr>
 </p:sld>
 </file>
 
